--- a/library/seminars/sem-09/rendered/sem-09-n75a.pptx
+++ b/library/seminars/sem-09/rendered/sem-09-n75a.pptx
@@ -502,25 +502,25 @@
           <a:lstStyle/>
           <a:p>
             <a:r>
-              <a:t>Последний такт перед закрытием занятия — и он не про седьмой кейс, а про все шесть сразу.</a:t>
+              <a:t>Последний такт перед закрытием занятия — общий взгляд на все шесть кейсов сразу.</a:t>
             </a:r>
           </a:p>
           <a:p/>
           <a:p>
             <a:r>
-              <a:t>Шесть разборов сегодня измерили шесть разных вещей. Кейс 1 — долю плохих исходов на одних и тех же пятнадцати вопросах. Кейс 2 — почистил ли формат промта одну конкретную ошибку сравнения чисел. Кейс 3 — сколько из двадцати первых ответов разные проверяющие приняли как годные. Кейс 4 — сколько заявок устояло против подмены поля. Кейс 5 — воспроизводится ли один и тот же верный ответ десять раз подряд. Кейс 6 — на каком сжатии фотографии ломается конкретное поле. У каждого свой вопрос, своя база для сравнения и свой размер выборки — от двух заявок до тридцати попыток. Сводить это в одну шкалу процентов и говорить «вот тут лучше, вот тут хуже» было бы нечестно — ровно та свёртка, против которой всё занятие было построено: у каждого числа своя база, и смешивать их в рейтинг значит потерять именно то, что каждый замер показал.</a:t>
+              <a:t>Шесть разборов сегодня измерили шесть разных вещей. Кейс 1 — долю плохих исходов на одних и тех же пятнадцати вопросах. Кейс 2 — почистил ли формат промта одну конкретную ошибку сравнения чисел. Кейс 3 — сколько из двадцати первых ответов разные проверяющие приняли как годные. Кейс 4 — сколько ложных решений остаётся, когда три классические защиты от инъекции работают по отдельности, парами и все вместе, и сколько даёт то же правило, посчитанное обычным кодом. Кейс 5 — воспроизводится ли один и тот же верный ответ десять раз подряд. Кейс 6 — на каком сжатии фотографии ломается конкретное поле. У каждого свой вопрос, своя база для сравнения и свой размер выборки — от двух заявок до тридцати попыток. Сводить это в одну шкалу процентов и говорить «вот тут лучше, вот тут хуже» было бы нечестно — ровно та свёртка, против которой всё занятие было построено: у каждого числа своя база, и смешивать их в рейтинг значит потерять именно то, что каждый замер показал.</a:t>
             </a:r>
           </a:p>
           <a:p/>
           <a:p>
             <a:r>
-              <a:t>Но если посмотреть на все шесть не как на рейтинг, а как на один вопрос, заданный шесть раз, видна одна закономерность, и её стоит проговорить честно, с границей. В пяти случаях решение можно было оставить внутри текста, который модель сама о себе пишет, — назвать число уверенности, попросить придерживаться инструкции, показать пример, спросить вторую модель-судью. Ни разу это не дало безошибочного результата: сорок процентов плохих исходов как потолок в Кейсе 1, ноль из восьми в Кейсе 2 на всех пяти перепробованных форматах, ноль из десяти дважды у few-shot в Кейсе 5. А там, где решение выносили туда, где его проверяет что-то, кроме текста модели, — код в Кейсе 3, отдельное числовое поле формы в Кейсе 4, прямое описание вместо примера на первом вопросе Кейса 5, — ошибок не было вовсе, четыре раза из шести измерений.</a:t>
+              <a:t>Но если посмотреть на все шесть как на один вопрос, заданный шесть раз, видна одна закономерность, и её стоит проговорить честно, с границей. В пяти случаях решение можно было оставить внутри текста, который модель сама о себе пишет, — назвать число уверенности, попросить придерживаться инструкции, показать пример, спросить вторую модель-судью. Ни разу это не дало безошибочного результата: сорок процентов плохих исходов как потолок в Кейсе 1, ноль из восьми в Кейсе 2 на всех пяти форматах, ноль из десяти дважды у few-shot в Кейсе 5. А там, где решение выносили туда, где его проверяет что-то, кроме текста модели, — код в Кейсе 3, то же правило, посчитанное кодом, в Кейсе 4, прямое описание вместо примера на первом вопросе Кейса 5, — ошибок не было вовсе три раза из шести измерений. Четвёртый похожий случай — сумма Кейса 6, прочитанная по шести разрешениям, — после честного повтора оказался уже не безошибочным: двадцать пять верных из тридцати возможных.</a:t>
             </a:r>
           </a:p>
           <a:p/>
           <a:p>
             <a:r>
-              <a:t>И сразу оговорка, без которой этот вывод соврал бы: вынесенный приём не застрахован навсегда. Комбинация код плюс судья в Кейсе 3 всё равно просела до восьмидесяти пяти процентов — добавление второго проверяющего само по себе цену ошибки не убирает. А то же самое описание правила в Кейсе 5 на втором вопросе дало уже не десять из десяти, а шесть. И Кейс 2 вообще не подтверждает закономерность: там ни один из пяти способов, включая попытку явно расписать правило условной формой, ошибку не почистил. Шесть измерений — не шесть подтверждений одного правила, а шесть честных точек, пять из которых указывают в одну сторону.</a:t>
+              <a:t>И сразу честная оговорка: вынесенный приём не застрахован навсегда. Комбинация код плюс судья в Кейсе 3 всё равно просела до восьмидесяти пяти процентов — добавление второго проверяющего цену ошибки не убирает. То же самое описание правила в Кейсе 5 на втором вопросе дало уже шесть верных из десяти вместо прежних десяти. И сумма Кейса 6 — тот же случай: держалась без единой ошибки на пяти разрешениях из шести, а на самом мелком сломалась чисто. И Кейс 2 вообще не подтверждает закономерность: там ни один из пяти способов, включая попытку явно расписать правило условной формой, ошибку не почистил. Эти шесть измерений — шесть честных точек, и большинство из них указывают в одну сторону; подтверждением одного-единственного правила все шесть сразу считать нельзя.</a:t>
             </a:r>
           </a:p>
         </p:txBody>
@@ -3585,7 +3585,7 @@
         <p:spPr>
           <a:xfrm>
             <a:off x="502920" y="943356"/>
-            <a:ext cx="11183112" cy="416686"/>
+            <a:ext cx="11183112" cy="457200"/>
           </a:xfrm>
           <a:prstGeom prst="roundRect">
             <a:avLst>
@@ -3634,7 +3634,7 @@
         <p:spPr>
           <a:xfrm>
             <a:off x="740664" y="1080516"/>
-            <a:ext cx="10707624" cy="142366"/>
+            <a:ext cx="10707624" cy="182880"/>
           </a:xfrm>
           <a:prstGeom prst="rect">
             <a:avLst/>
@@ -3671,7 +3671,7 @@
                 </a:solidFill>
                 <a:latin typeface="Arial"/>
               </a:rPr>
-              <a:t> Разные задачи, базовые линии и N — не рейтинг «кейс X лучше Y», а свод того, что каждый кейс измерил как главный результат.</a:t>
+              <a:t> Разные задачи, базовые линии и N — это свод того, что каждый кейс измерил как главный результат. Рейтингом «кейс X лучше Y» это не является.</a:t>
             </a:r>
           </a:p>
         </p:txBody>
@@ -3684,12 +3684,12 @@
         </p:nvSpPr>
         <p:spPr>
           <a:xfrm>
-            <a:off x="502920" y="1524635"/>
-            <a:ext cx="11183112" cy="2792476"/>
+            <a:off x="502920" y="1565148"/>
+            <a:ext cx="11183112" cy="2503551"/>
           </a:xfrm>
           <a:prstGeom prst="roundRect">
             <a:avLst>
-              <a:gd name="adj" fmla="val 10915"/>
+              <a:gd name="adj" fmla="val 12174"/>
             </a:avLst>
           </a:prstGeom>
           <a:solidFill>
@@ -3732,8 +3732,8 @@
         </p:nvSpPr>
         <p:spPr>
           <a:xfrm>
-            <a:off x="658368" y="1680083"/>
-            <a:ext cx="2025479" cy="252095"/>
+            <a:off x="630936" y="1693164"/>
+            <a:ext cx="1959053" cy="252095"/>
           </a:xfrm>
           <a:prstGeom prst="rect">
             <a:avLst/>
@@ -3774,8 +3774,8 @@
         </p:nvSpPr>
         <p:spPr>
           <a:xfrm>
-            <a:off x="2830151" y="1680083"/>
-            <a:ext cx="3130476" cy="252095"/>
+            <a:off x="2736293" y="1693164"/>
+            <a:ext cx="3287203" cy="252095"/>
           </a:xfrm>
           <a:prstGeom prst="rect">
             <a:avLst/>
@@ -3816,8 +3816,8 @@
         </p:nvSpPr>
         <p:spPr>
           <a:xfrm>
-            <a:off x="6106931" y="1680083"/>
-            <a:ext cx="4516293" cy="252095"/>
+            <a:off x="6169800" y="1693164"/>
+            <a:ext cx="4477015" cy="252095"/>
           </a:xfrm>
           <a:prstGeom prst="rect">
             <a:avLst/>
@@ -3858,8 +3858,8 @@
         </p:nvSpPr>
         <p:spPr>
           <a:xfrm>
-            <a:off x="10769528" y="1680083"/>
-            <a:ext cx="614751" cy="252095"/>
+            <a:off x="10793120" y="1693164"/>
+            <a:ext cx="618591" cy="252095"/>
           </a:xfrm>
           <a:prstGeom prst="rect">
             <a:avLst/>
@@ -3900,8 +3900,8 @@
         </p:nvSpPr>
         <p:spPr>
           <a:xfrm>
-            <a:off x="658368" y="1932178"/>
-            <a:ext cx="2025479" cy="391033"/>
+            <a:off x="630936" y="1945259"/>
+            <a:ext cx="1959053" cy="351536"/>
           </a:xfrm>
           <a:prstGeom prst="rect">
             <a:avLst/>
@@ -3916,7 +3916,7 @@
           <a:p>
             <a:pPr algn="l">
               <a:lnSpc>
-                <a:spcPts val="1035"/>
+                <a:spcPts val="988"/>
               </a:lnSpc>
               <a:spcAft>
                 <a:spcPts val="0"/>
@@ -3942,8 +3942,8 @@
         </p:nvSpPr>
         <p:spPr>
           <a:xfrm>
-            <a:off x="2830151" y="1932178"/>
-            <a:ext cx="3130476" cy="391033"/>
+            <a:off x="2736293" y="1945259"/>
+            <a:ext cx="3287203" cy="351536"/>
           </a:xfrm>
           <a:prstGeom prst="rect">
             <a:avLst/>
@@ -3958,7 +3958,7 @@
           <a:p>
             <a:pPr algn="l">
               <a:lnSpc>
-                <a:spcPts val="1035"/>
+                <a:spcPts val="988"/>
               </a:lnSpc>
               <a:spcAft>
                 <a:spcPts val="0"/>
@@ -3984,8 +3984,8 @@
         </p:nvSpPr>
         <p:spPr>
           <a:xfrm>
-            <a:off x="6106931" y="1932178"/>
-            <a:ext cx="4516293" cy="391033"/>
+            <a:off x="6169800" y="1945259"/>
+            <a:ext cx="4477015" cy="351536"/>
           </a:xfrm>
           <a:prstGeom prst="rect">
             <a:avLst/>
@@ -4000,7 +4000,7 @@
           <a:p>
             <a:pPr algn="l">
               <a:lnSpc>
-                <a:spcPts val="1035"/>
+                <a:spcPts val="988"/>
               </a:lnSpc>
               <a:spcAft>
                 <a:spcPts val="0"/>
@@ -4026,8 +4026,8 @@
         </p:nvSpPr>
         <p:spPr>
           <a:xfrm>
-            <a:off x="10769528" y="1932178"/>
-            <a:ext cx="614751" cy="391033"/>
+            <a:off x="10793120" y="1945259"/>
+            <a:ext cx="618591" cy="351536"/>
           </a:xfrm>
           <a:prstGeom prst="rect">
             <a:avLst/>
@@ -4042,7 +4042,7 @@
           <a:p>
             <a:pPr algn="l">
               <a:lnSpc>
-                <a:spcPts val="1035"/>
+                <a:spcPts val="988"/>
               </a:lnSpc>
               <a:spcAft>
                 <a:spcPts val="0"/>
@@ -4068,8 +4068,8 @@
         </p:nvCxnSpPr>
         <p:spPr>
           <a:xfrm>
-            <a:off x="658368" y="2323210"/>
-            <a:ext cx="10872216" cy="0"/>
+            <a:off x="630936" y="2296795"/>
+            <a:ext cx="10927080" cy="0"/>
           </a:xfrm>
           <a:prstGeom prst="line">
             <a:avLst/>
@@ -4103,8 +4103,8 @@
         </p:nvSpPr>
         <p:spPr>
           <a:xfrm>
-            <a:off x="658368" y="2323210"/>
-            <a:ext cx="2025479" cy="391033"/>
+            <a:off x="630936" y="2296795"/>
+            <a:ext cx="1959053" cy="351536"/>
           </a:xfrm>
           <a:prstGeom prst="rect">
             <a:avLst/>
@@ -4119,7 +4119,7 @@
           <a:p>
             <a:pPr algn="l">
               <a:lnSpc>
-                <a:spcPts val="1035"/>
+                <a:spcPts val="988"/>
               </a:lnSpc>
               <a:spcAft>
                 <a:spcPts val="0"/>
@@ -4132,7 +4132,7 @@
                 </a:solidFill>
                 <a:latin typeface="Arial"/>
               </a:rPr>
-              <a:t>Кейс 2. База знаний в промте</a:t>
+              <a:t>Кейс 2. Оптимизация промта</a:t>
             </a:r>
           </a:p>
         </p:txBody>
@@ -4145,8 +4145,8 @@
         </p:nvSpPr>
         <p:spPr>
           <a:xfrm>
-            <a:off x="2830151" y="2323210"/>
-            <a:ext cx="3130476" cy="391033"/>
+            <a:off x="2736293" y="2296795"/>
+            <a:ext cx="3287203" cy="351536"/>
           </a:xfrm>
           <a:prstGeom prst="rect">
             <a:avLst/>
@@ -4161,7 +4161,7 @@
           <a:p>
             <a:pPr algn="l">
               <a:lnSpc>
-                <a:spcPts val="1035"/>
+                <a:spcPts val="988"/>
               </a:lnSpc>
               <a:spcAft>
                 <a:spcPts val="0"/>
@@ -4187,8 +4187,8 @@
         </p:nvSpPr>
         <p:spPr>
           <a:xfrm>
-            <a:off x="6106931" y="2323210"/>
-            <a:ext cx="4516293" cy="391033"/>
+            <a:off x="6169800" y="2296795"/>
+            <a:ext cx="4477015" cy="351536"/>
           </a:xfrm>
           <a:prstGeom prst="rect">
             <a:avLst/>
@@ -4203,7 +4203,7 @@
           <a:p>
             <a:pPr algn="l">
               <a:lnSpc>
-                <a:spcPts val="1035"/>
+                <a:spcPts val="988"/>
               </a:lnSpc>
               <a:spcAft>
                 <a:spcPts val="0"/>
@@ -4229,8 +4229,8 @@
         </p:nvSpPr>
         <p:spPr>
           <a:xfrm>
-            <a:off x="10769528" y="2323210"/>
-            <a:ext cx="614751" cy="391033"/>
+            <a:off x="10793120" y="2296795"/>
+            <a:ext cx="618591" cy="351536"/>
           </a:xfrm>
           <a:prstGeom prst="rect">
             <a:avLst/>
@@ -4245,7 +4245,7 @@
           <a:p>
             <a:pPr algn="l">
               <a:lnSpc>
-                <a:spcPts val="1035"/>
+                <a:spcPts val="988"/>
               </a:lnSpc>
               <a:spcAft>
                 <a:spcPts val="0"/>
@@ -4271,8 +4271,8 @@
         </p:nvCxnSpPr>
         <p:spPr>
           <a:xfrm>
-            <a:off x="658368" y="2714243"/>
-            <a:ext cx="10872216" cy="0"/>
+            <a:off x="630936" y="2648331"/>
+            <a:ext cx="10927080" cy="0"/>
           </a:xfrm>
           <a:prstGeom prst="line">
             <a:avLst/>
@@ -4306,8 +4306,8 @@
         </p:nvSpPr>
         <p:spPr>
           <a:xfrm>
-            <a:off x="658368" y="2714243"/>
-            <a:ext cx="2025479" cy="391033"/>
+            <a:off x="630936" y="2648331"/>
+            <a:ext cx="1959053" cy="351536"/>
           </a:xfrm>
           <a:prstGeom prst="rect">
             <a:avLst/>
@@ -4322,7 +4322,7 @@
           <a:p>
             <a:pPr algn="l">
               <a:lnSpc>
-                <a:spcPts val="1035"/>
+                <a:spcPts val="988"/>
               </a:lnSpc>
               <a:spcAft>
                 <a:spcPts val="0"/>
@@ -4348,8 +4348,8 @@
         </p:nvSpPr>
         <p:spPr>
           <a:xfrm>
-            <a:off x="2830151" y="2714243"/>
-            <a:ext cx="3130476" cy="391033"/>
+            <a:off x="2736293" y="2648331"/>
+            <a:ext cx="3287203" cy="351536"/>
           </a:xfrm>
           <a:prstGeom prst="rect">
             <a:avLst/>
@@ -4364,7 +4364,7 @@
           <a:p>
             <a:pPr algn="l">
               <a:lnSpc>
-                <a:spcPts val="1035"/>
+                <a:spcPts val="988"/>
               </a:lnSpc>
               <a:spcAft>
                 <a:spcPts val="0"/>
@@ -4390,8 +4390,8 @@
         </p:nvSpPr>
         <p:spPr>
           <a:xfrm>
-            <a:off x="6106931" y="2714243"/>
-            <a:ext cx="4516293" cy="391033"/>
+            <a:off x="6169800" y="2648331"/>
+            <a:ext cx="4477015" cy="351536"/>
           </a:xfrm>
           <a:prstGeom prst="rect">
             <a:avLst/>
@@ -4406,7 +4406,7 @@
           <a:p>
             <a:pPr algn="l">
               <a:lnSpc>
-                <a:spcPts val="1035"/>
+                <a:spcPts val="988"/>
               </a:lnSpc>
               <a:spcAft>
                 <a:spcPts val="0"/>
@@ -4432,8 +4432,8 @@
         </p:nvSpPr>
         <p:spPr>
           <a:xfrm>
-            <a:off x="10769528" y="2714243"/>
-            <a:ext cx="614751" cy="391033"/>
+            <a:off x="10793120" y="2648331"/>
+            <a:ext cx="618591" cy="351536"/>
           </a:xfrm>
           <a:prstGeom prst="rect">
             <a:avLst/>
@@ -4448,7 +4448,7 @@
           <a:p>
             <a:pPr algn="l">
               <a:lnSpc>
-                <a:spcPts val="1035"/>
+                <a:spcPts val="988"/>
               </a:lnSpc>
               <a:spcAft>
                 <a:spcPts val="0"/>
@@ -4474,8 +4474,8 @@
         </p:nvCxnSpPr>
         <p:spPr>
           <a:xfrm>
-            <a:off x="658368" y="3105276"/>
-            <a:ext cx="10872216" cy="0"/>
+            <a:off x="630936" y="2999867"/>
+            <a:ext cx="10927080" cy="0"/>
           </a:xfrm>
           <a:prstGeom prst="line">
             <a:avLst/>
@@ -4509,8 +4509,8 @@
         </p:nvSpPr>
         <p:spPr>
           <a:xfrm>
-            <a:off x="658368" y="3105276"/>
-            <a:ext cx="2025479" cy="391033"/>
+            <a:off x="630936" y="2999867"/>
+            <a:ext cx="1959053" cy="351536"/>
           </a:xfrm>
           <a:prstGeom prst="rect">
             <a:avLst/>
@@ -4525,7 +4525,7 @@
           <a:p>
             <a:pPr algn="l">
               <a:lnSpc>
-                <a:spcPts val="1035"/>
+                <a:spcPts val="988"/>
               </a:lnSpc>
               <a:spcAft>
                 <a:spcPts val="0"/>
@@ -4538,7 +4538,7 @@
                 </a:solidFill>
                 <a:latin typeface="Arial"/>
               </a:rPr>
-              <a:t>Кейс 4. Текст клиента как инструкция</a:t>
+              <a:t>Кейс 4. Защита от инъекций и манипуляций</a:t>
             </a:r>
           </a:p>
         </p:txBody>
@@ -4551,8 +4551,8 @@
         </p:nvSpPr>
         <p:spPr>
           <a:xfrm>
-            <a:off x="2830151" y="3105276"/>
-            <a:ext cx="3130476" cy="391033"/>
+            <a:off x="2736293" y="2999867"/>
+            <a:ext cx="3287203" cy="351536"/>
           </a:xfrm>
           <a:prstGeom prst="rect">
             <a:avLst/>
@@ -4567,7 +4567,7 @@
           <a:p>
             <a:pPr algn="l">
               <a:lnSpc>
-                <a:spcPts val="1035"/>
+                <a:spcPts val="988"/>
               </a:lnSpc>
               <a:spcAft>
                 <a:spcPts val="0"/>
@@ -4580,7 +4580,7 @@
                 </a:solidFill>
                 <a:latin typeface="Arial"/>
               </a:rPr>
-              <a:t>доля заявок без подмены поля, 2 защиты</a:t>
+              <a:t>доля верных решений, правило в коде против лучшей защиты на модели</a:t>
             </a:r>
           </a:p>
         </p:txBody>
@@ -4593,8 +4593,8 @@
         </p:nvSpPr>
         <p:spPr>
           <a:xfrm>
-            <a:off x="6106931" y="3105276"/>
-            <a:ext cx="4516293" cy="391033"/>
+            <a:off x="6169800" y="2999867"/>
+            <a:ext cx="4477015" cy="351536"/>
           </a:xfrm>
           <a:prstGeom prst="rect">
             <a:avLst/>
@@ -4609,7 +4609,7 @@
           <a:p>
             <a:pPr algn="l">
               <a:lnSpc>
-                <a:spcPts val="1035"/>
+                <a:spcPts val="988"/>
               </a:lnSpc>
               <a:spcAft>
                 <a:spcPts val="0"/>
@@ -4622,7 +4622,7 @@
                 </a:solidFill>
                 <a:latin typeface="Arial"/>
               </a:rPr>
-              <a:t>числовое поле — 2 (100%) · промт-защита — 1/3 полностью, 1/3 нет, 1/3 отказ процесса</a:t>
+              <a:t>правило в коде — 64 из 64 (100%) · лучшая защита на модели (промт+механика) — 53 из 64 (83%)</a:t>
             </a:r>
           </a:p>
         </p:txBody>
@@ -4635,8 +4635,8 @@
         </p:nvSpPr>
         <p:spPr>
           <a:xfrm>
-            <a:off x="10769528" y="3105276"/>
-            <a:ext cx="614751" cy="391033"/>
+            <a:off x="10793120" y="2999867"/>
+            <a:ext cx="618591" cy="351536"/>
           </a:xfrm>
           <a:prstGeom prst="rect">
             <a:avLst/>
@@ -4651,7 +4651,7 @@
           <a:p>
             <a:pPr algn="l">
               <a:lnSpc>
-                <a:spcPts val="1035"/>
+                <a:spcPts val="988"/>
               </a:lnSpc>
               <a:spcAft>
                 <a:spcPts val="0"/>
@@ -4664,7 +4664,7 @@
                 </a:solidFill>
                 <a:latin typeface="Arial"/>
               </a:rPr>
-              <a:t>2 · 3×2</a:t>
+              <a:t>64 · 64×8</a:t>
             </a:r>
           </a:p>
         </p:txBody>
@@ -4677,8 +4677,8 @@
         </p:nvCxnSpPr>
         <p:spPr>
           <a:xfrm>
-            <a:off x="658368" y="3496309"/>
-            <a:ext cx="10872216" cy="0"/>
+            <a:off x="630936" y="3351403"/>
+            <a:ext cx="10927080" cy="0"/>
           </a:xfrm>
           <a:prstGeom prst="line">
             <a:avLst/>
@@ -4712,8 +4712,8 @@
         </p:nvSpPr>
         <p:spPr>
           <a:xfrm>
-            <a:off x="658368" y="3496309"/>
-            <a:ext cx="2025479" cy="391033"/>
+            <a:off x="630936" y="3351403"/>
+            <a:ext cx="1959053" cy="237744"/>
           </a:xfrm>
           <a:prstGeom prst="rect">
             <a:avLst/>
@@ -4728,7 +4728,7 @@
           <a:p>
             <a:pPr algn="l">
               <a:lnSpc>
-                <a:spcPts val="1035"/>
+                <a:spcPts val="988"/>
               </a:lnSpc>
               <a:spcAft>
                 <a:spcPts val="0"/>
@@ -4754,8 +4754,8 @@
         </p:nvSpPr>
         <p:spPr>
           <a:xfrm>
-            <a:off x="2830151" y="3496309"/>
-            <a:ext cx="3130476" cy="391033"/>
+            <a:off x="2736293" y="3351403"/>
+            <a:ext cx="3287203" cy="237744"/>
           </a:xfrm>
           <a:prstGeom prst="rect">
             <a:avLst/>
@@ -4770,7 +4770,7 @@
           <a:p>
             <a:pPr algn="l">
               <a:lnSpc>
-                <a:spcPts val="1035"/>
+                <a:spcPts val="988"/>
               </a:lnSpc>
               <a:spcAft>
                 <a:spcPts val="0"/>
@@ -4796,8 +4796,8 @@
         </p:nvSpPr>
         <p:spPr>
           <a:xfrm>
-            <a:off x="6106931" y="3496309"/>
-            <a:ext cx="4516293" cy="391033"/>
+            <a:off x="6169800" y="3351403"/>
+            <a:ext cx="4477015" cy="237744"/>
           </a:xfrm>
           <a:prstGeom prst="rect">
             <a:avLst/>
@@ -4812,7 +4812,7 @@
           <a:p>
             <a:pPr algn="l">
               <a:lnSpc>
-                <a:spcPts val="1035"/>
+                <a:spcPts val="988"/>
               </a:lnSpc>
               <a:spcAft>
                 <a:spcPts val="0"/>
@@ -4838,8 +4838,8 @@
         </p:nvSpPr>
         <p:spPr>
           <a:xfrm>
-            <a:off x="10769528" y="3496309"/>
-            <a:ext cx="614751" cy="391033"/>
+            <a:off x="10793120" y="3351403"/>
+            <a:ext cx="618591" cy="237744"/>
           </a:xfrm>
           <a:prstGeom prst="rect">
             <a:avLst/>
@@ -4854,7 +4854,7 @@
           <a:p>
             <a:pPr algn="l">
               <a:lnSpc>
-                <a:spcPts val="1035"/>
+                <a:spcPts val="988"/>
               </a:lnSpc>
               <a:spcAft>
                 <a:spcPts val="0"/>
@@ -4880,8 +4880,8 @@
         </p:nvCxnSpPr>
         <p:spPr>
           <a:xfrm>
-            <a:off x="658368" y="3887342"/>
-            <a:ext cx="10872216" cy="0"/>
+            <a:off x="630936" y="3589147"/>
+            <a:ext cx="10927080" cy="0"/>
           </a:xfrm>
           <a:prstGeom prst="line">
             <a:avLst/>
@@ -4915,8 +4915,8 @@
         </p:nvSpPr>
         <p:spPr>
           <a:xfrm>
-            <a:off x="658368" y="3887342"/>
-            <a:ext cx="2025479" cy="274320"/>
+            <a:off x="630936" y="3589147"/>
+            <a:ext cx="1959053" cy="351536"/>
           </a:xfrm>
           <a:prstGeom prst="rect">
             <a:avLst/>
@@ -4931,7 +4931,7 @@
           <a:p>
             <a:pPr algn="l">
               <a:lnSpc>
-                <a:spcPts val="1035"/>
+                <a:spcPts val="988"/>
               </a:lnSpc>
               <a:spcAft>
                 <a:spcPts val="0"/>
@@ -4957,8 +4957,8 @@
         </p:nvSpPr>
         <p:spPr>
           <a:xfrm>
-            <a:off x="2830151" y="3887342"/>
-            <a:ext cx="3130476" cy="274320"/>
+            <a:off x="2736293" y="3589147"/>
+            <a:ext cx="3287203" cy="351536"/>
           </a:xfrm>
           <a:prstGeom prst="rect">
             <a:avLst/>
@@ -4973,7 +4973,7 @@
           <a:p>
             <a:pPr algn="l">
               <a:lnSpc>
-                <a:spcPts val="1035"/>
+                <a:spcPts val="988"/>
               </a:lnSpc>
               <a:spcAft>
                 <a:spcPts val="0"/>
@@ -4999,8 +4999,8 @@
         </p:nvSpPr>
         <p:spPr>
           <a:xfrm>
-            <a:off x="6106931" y="3887342"/>
-            <a:ext cx="4516293" cy="274320"/>
+            <a:off x="6169800" y="3589147"/>
+            <a:ext cx="4477015" cy="351536"/>
           </a:xfrm>
           <a:prstGeom prst="rect">
             <a:avLst/>
@@ -5015,7 +5015,7 @@
           <a:p>
             <a:pPr algn="l">
               <a:lnSpc>
-                <a:spcPts val="1035"/>
+                <a:spcPts val="988"/>
               </a:lnSpc>
               <a:spcAft>
                 <a:spcPts val="0"/>
@@ -5028,7 +5028,7 @@
                 </a:solidFill>
                 <a:latin typeface="Arial"/>
               </a:rPr>
-              <a:t>сумма — 30/30 до 53×64 px · дата верна до 424×518, 0/15 мельче</a:t>
+              <a:t>сумма — 25/30, ломается на 53×64 px · дата верна до 424×518, 0/15 мельче</a:t>
             </a:r>
           </a:p>
         </p:txBody>
@@ -5041,8 +5041,8 @@
         </p:nvSpPr>
         <p:spPr>
           <a:xfrm>
-            <a:off x="10769528" y="3887342"/>
-            <a:ext cx="614751" cy="274320"/>
+            <a:off x="10793120" y="3589147"/>
+            <a:ext cx="618591" cy="351536"/>
           </a:xfrm>
           <a:prstGeom prst="rect">
             <a:avLst/>
@@ -5057,7 +5057,7 @@
           <a:p>
             <a:pPr algn="l">
               <a:lnSpc>
-                <a:spcPts val="1035"/>
+                <a:spcPts val="988"/>
               </a:lnSpc>
               <a:spcAft>
                 <a:spcPts val="0"/>
@@ -5083,12 +5083,12 @@
         </p:nvSpPr>
         <p:spPr>
           <a:xfrm>
-            <a:off x="502920" y="4481703"/>
-            <a:ext cx="11183112" cy="1653032"/>
+            <a:off x="502920" y="4233291"/>
+            <a:ext cx="11183112" cy="1922779"/>
           </a:xfrm>
           <a:prstGeom prst="roundRect">
             <a:avLst>
-              <a:gd name="adj" fmla="val 18438"/>
+              <a:gd name="adj" fmla="val 15852"/>
             </a:avLst>
           </a:prstGeom>
           <a:solidFill>
@@ -5131,8 +5131,8 @@
         </p:nvSpPr>
         <p:spPr>
           <a:xfrm>
-            <a:off x="521208" y="4536567"/>
-            <a:ext cx="64008" cy="1543304"/>
+            <a:off x="521208" y="4288155"/>
+            <a:ext cx="64008" cy="1813051"/>
           </a:xfrm>
           <a:prstGeom prst="roundRect">
             <a:avLst>
@@ -5177,8 +5177,8 @@
         </p:nvSpPr>
         <p:spPr>
           <a:xfrm>
-            <a:off x="804672" y="4618863"/>
-            <a:ext cx="10643616" cy="1378712"/>
+            <a:off x="804672" y="4370451"/>
+            <a:ext cx="10643616" cy="1648459"/>
           </a:xfrm>
           <a:prstGeom prst="rect">
             <a:avLst/>
@@ -5193,14 +5193,14 @@
           <a:p>
             <a:pPr algn="l">
               <a:lnSpc>
-                <a:spcPts val="1356"/>
+                <a:spcPts val="1297"/>
               </a:lnSpc>
               <a:spcAft>
                 <a:spcPts val="300"/>
               </a:spcAft>
             </a:pPr>
             <a:r>
-              <a:rPr sz="1150" b="1" i="0">
+              <a:rPr sz="1100" b="1" i="0">
                 <a:solidFill>
                   <a:srgbClr val="141B2E"/>
                 </a:solidFill>
@@ -5209,13 +5209,13 @@
               <a:t>Что честно читается из всех шести вместе.</a:t>
             </a:r>
             <a:r>
-              <a:rPr sz="1150" b="0" i="0">
+              <a:rPr sz="1100" b="0" i="0">
                 <a:solidFill>
                   <a:srgbClr val="141B2E"/>
                 </a:solidFill>
                 <a:latin typeface="Arial"/>
               </a:rPr>
-              <a:t> Там, где решающий сигнал оставался внутри текста, который модель пишет о себе, — самооценка уверенности, промт-инструкция, пример-демонстрация, второй вызов той же модели в роли судьи, — лучший измеренный результат нигде не дошёл до безошибочного: потолок Кейса 1 — 40%, Кейс 2 — 0 из 8 на всех пяти направлениях, few-shot Кейса 5 — 0 из 10 дважды. Там, где решение вынесено туда, где его проверяет что-то кроме текста модели — код, отдельное числовое поле формы, прямое описание вместо примера, — четыре из шести измерений оказались безошибочными: код (20 из 20), числовое поле (2 из 2), описание на первом вопросе (10 из 10), сумма на шести сжатиях (30 из 30). Это не гарантия на будущее: та же комбинация код+судья просела до 85%, а то же описание на втором вопросе Кейса 5 дало уже 6 из 10, не 10. Кейс 2 в эту закономерность не укладывается вовсе — там ни один вынесенный вариант правила (включая явную условную форму) не помог.</a:t>
+              <a:t> Там, где решающий сигнал оставался внутри текста, который модель пишет о себе, — самооценка уверенности, промт-инструкция, пример-демонстрация, второй вызов той же модели в роли судьи, — лучший измеренный результат нигде не дошёл до безошибочного: потолок Кейса 1 — 40%, Кейс 2 — 0 из 8 на всех пяти направлениях, few-shot Кейса 5 — 0 из 10 дважды. Там, где решение вынесено туда, где его проверяет что-то кроме текста модели — код, отдельное числовое поле формы, прямое описание вместо примера, — три из шести измерений оказались безошибочными: код Кейса 3 (20 из 20), то же правило, посчитанное кодом, в Кейсе 4 (64 из 64), описание на первом вопросе (10 из 10). Четвёртое похожее измерение, сумма Кейса 6 по шести сжатиям, тоже вынесено за пределы самоотчёта модели — но после честного повтора 2026-10-27 уже не безошибочно: 25 из 30. Это и есть живой пример того, что вывод не гарантирует будущее: та же комбинация код+судья просела до 85%; то же описание на втором вопросе Кейса 5 дало уже 6 из 10 вместо 10; и сумма Кейса 6, державшаяся без ошибок на пяти разрешениях из шести, в итоге сломалась на самом мелком. Кейс 2 в эту закономерность не укладывается вовсе — там ни один вынесенный вариант правила (включая явную условную форму) не помог.</a:t>
             </a:r>
           </a:p>
         </p:txBody>
@@ -5257,7 +5257,7 @@
                 </a:solidFill>
                 <a:latin typeface="Arial"/>
               </a:rPr>
-              <a:t>82</a:t>
+              <a:t>92</a:t>
             </a:r>
           </a:p>
         </p:txBody>
